--- a/Programming01/Session02/slides.pptx
+++ b/Programming01/Session02/slides.pptx
@@ -5,7 +5,7 @@
     <p:sldMasterId id="2147483648" r:id="rId1"/>
   </p:sldMasterIdLst>
   <p:notesMasterIdLst>
-    <p:notesMasterId r:id="rId12"/>
+    <p:notesMasterId r:id="rId20"/>
   </p:notesMasterIdLst>
   <p:sldIdLst>
     <p:sldId id="256" r:id="rId2"/>
@@ -18,6 +18,14 @@
     <p:sldId id="263" r:id="rId9"/>
     <p:sldId id="264" r:id="rId10"/>
     <p:sldId id="265" r:id="rId11"/>
+    <p:sldId id="266" r:id="rId12"/>
+    <p:sldId id="267" r:id="rId13"/>
+    <p:sldId id="268" r:id="rId14"/>
+    <p:sldId id="269" r:id="rId15"/>
+    <p:sldId id="270" r:id="rId16"/>
+    <p:sldId id="271" r:id="rId17"/>
+    <p:sldId id="272" r:id="rId18"/>
+    <p:sldId id="273" r:id="rId19"/>
   </p:sldIdLst>
   <p:sldSz cx="9144000" cy="5143500" type="screen16x9"/>
   <p:notesSz cx="6858000" cy="9144000"/>
@@ -576,6 +584,666 @@
 </p:notes>
 </file>
 
+<file path=ppt/notesSlides/notesSlide10.xml><?xml version="1.0" encoding="utf-8"?>
+<p:notes xmlns:a="http://schemas.openxmlformats.org/drawingml/2006/main" xmlns:r="http://schemas.openxmlformats.org/officeDocument/2006/relationships" xmlns:p="http://schemas.openxmlformats.org/presentationml/2006/main">
+  <p:cSld>
+    <p:spTree>
+      <p:nvGrpSpPr>
+        <p:cNvPr id="1" name=""/>
+        <p:cNvGrpSpPr/>
+        <p:nvPr/>
+      </p:nvGrpSpPr>
+      <p:grpSpPr>
+        <a:xfrm>
+          <a:off x="0" y="0"/>
+          <a:ext cx="0" cy="0"/>
+          <a:chOff x="0" y="0"/>
+          <a:chExt cx="0" cy="0"/>
+        </a:xfrm>
+      </p:grpSpPr>
+      <p:sp>
+        <p:nvSpPr>
+          <p:cNvPr id="2" name="Slide Image Placeholder 1"/>
+          <p:cNvSpPr>
+            <a:spLocks noGrp="1" noRot="1" noChangeAspect="1"/>
+          </p:cNvSpPr>
+          <p:nvPr>
+            <p:ph type="sldImg"/>
+          </p:nvPr>
+        </p:nvSpPr>
+        <p:spPr/>
+      </p:sp>
+      <p:sp>
+        <p:nvSpPr>
+          <p:cNvPr id="3" name="Notes Placeholder 2"/>
+          <p:cNvSpPr>
+            <a:spLocks noGrp="1"/>
+          </p:cNvSpPr>
+          <p:nvPr>
+            <p:ph type="body" idx="1"/>
+          </p:nvPr>
+        </p:nvSpPr>
+        <p:spPr/>
+        <p:txBody>
+          <a:bodyPr/>
+          <a:lstStyle/>
+          <a:p>
+            <a:pPr lvl="0" indent="0" marL="0">
+              <a:buNone/>
+            </a:pPr>
+            <a:r>
+              <a:rPr/>
+              <a:t>Live demo in a scratch folder: </a:t>
+            </a:r>
+            <a:r>
+              <a:rPr>
+                <a:latin typeface="Courier"/>
+              </a:rPr>
+              <a:t>git init</a:t>
+            </a:r>
+            <a:r>
+              <a:rPr/>
+              <a:t>, create a file, </a:t>
+            </a:r>
+            <a:r>
+              <a:rPr>
+                <a:latin typeface="Courier"/>
+              </a:rPr>
+              <a:t>status</a:t>
+            </a:r>
+            <a:r>
+              <a:rPr/>
+              <a:t>, </a:t>
+            </a:r>
+            <a:r>
+              <a:rPr>
+                <a:latin typeface="Courier"/>
+              </a:rPr>
+              <a:t>add</a:t>
+            </a:r>
+            <a:r>
+              <a:rPr/>
+              <a:t>, </a:t>
+            </a:r>
+            <a:r>
+              <a:rPr>
+                <a:latin typeface="Courier"/>
+              </a:rPr>
+              <a:t>status</a:t>
+            </a:r>
+            <a:r>
+              <a:rPr/>
+              <a:t>, </a:t>
+            </a:r>
+            <a:r>
+              <a:rPr>
+                <a:latin typeface="Courier"/>
+              </a:rPr>
+              <a:t>commit</a:t>
+            </a:r>
+            <a:r>
+              <a:rPr/>
+              <a:t>, edit, </a:t>
+            </a:r>
+            <a:r>
+              <a:rPr>
+                <a:latin typeface="Courier"/>
+              </a:rPr>
+              <a:t>diff</a:t>
+            </a:r>
+            <a:r>
+              <a:rPr/>
+              <a:t>, commit again, </a:t>
+            </a:r>
+            <a:r>
+              <a:rPr>
+                <a:latin typeface="Courier"/>
+              </a:rPr>
+              <a:t>log</a:t>
+            </a:r>
+            <a:r>
+              <a:rPr/>
+              <a:t>. The first time, git asks who you are: </a:t>
+            </a:r>
+            <a:r>
+              <a:rPr>
+                <a:latin typeface="Courier"/>
+              </a:rPr>
+              <a:t>git config --global user.name "..."</a:t>
+            </a:r>
+            <a:r>
+              <a:rPr/>
+              <a:t> and </a:t>
+            </a:r>
+            <a:r>
+              <a:rPr>
+                <a:latin typeface="Courier"/>
+              </a:rPr>
+              <a:t>user.email</a:t>
+            </a:r>
+            <a:r>
+              <a:rPr/>
+              <a:t>. Every commit carries that name. A good message completes the sentence “this commit will…”: “Drop rows without age”, not “update” or “fix”. One logical change per commit.</a:t>
+            </a:r>
+          </a:p>
+        </p:txBody>
+      </p:sp>
+      <p:sp>
+        <p:nvSpPr>
+          <p:cNvPr id="4" name="Slide Number Placeholder 3"/>
+          <p:cNvSpPr>
+            <a:spLocks noGrp="1"/>
+          </p:cNvSpPr>
+          <p:nvPr>
+            <p:ph type="sldNum" sz="quarter" idx="10"/>
+          </p:nvPr>
+        </p:nvSpPr>
+        <p:spPr/>
+        <p:txBody>
+          <a:bodyPr/>
+          <a:lstStyle/>
+          <a:p>
+            <a:fld id="{18BDFEC3-8487-43E8-A154-7C12CBC1FFF2}" type="slidenum">
+              <a:rPr lang="en-US"/>
+              <a:t>14</a:t>
+            </a:fld>
+            <a:endParaRPr lang="en-US"/>
+          </a:p>
+        </p:txBody>
+      </p:sp>
+    </p:spTree>
+  </p:cSld>
+</p:notes>
+</file>
+
+<file path=ppt/notesSlides/notesSlide11.xml><?xml version="1.0" encoding="utf-8"?>
+<p:notes xmlns:a="http://schemas.openxmlformats.org/drawingml/2006/main" xmlns:r="http://schemas.openxmlformats.org/officeDocument/2006/relationships" xmlns:p="http://schemas.openxmlformats.org/presentationml/2006/main">
+  <p:cSld>
+    <p:spTree>
+      <p:nvGrpSpPr>
+        <p:cNvPr id="1" name=""/>
+        <p:cNvGrpSpPr/>
+        <p:nvPr/>
+      </p:nvGrpSpPr>
+      <p:grpSpPr>
+        <a:xfrm>
+          <a:off x="0" y="0"/>
+          <a:ext cx="0" cy="0"/>
+          <a:chOff x="0" y="0"/>
+          <a:chExt cx="0" cy="0"/>
+        </a:xfrm>
+      </p:grpSpPr>
+      <p:sp>
+        <p:nvSpPr>
+          <p:cNvPr id="2" name="Slide Image Placeholder 1"/>
+          <p:cNvSpPr>
+            <a:spLocks noGrp="1" noRot="1" noChangeAspect="1"/>
+          </p:cNvSpPr>
+          <p:nvPr>
+            <p:ph type="sldImg"/>
+          </p:nvPr>
+        </p:nvSpPr>
+        <p:spPr/>
+      </p:sp>
+      <p:sp>
+        <p:nvSpPr>
+          <p:cNvPr id="3" name="Notes Placeholder 2"/>
+          <p:cNvSpPr>
+            <a:spLocks noGrp="1"/>
+          </p:cNvSpPr>
+          <p:nvPr>
+            <p:ph type="body" idx="1"/>
+          </p:nvPr>
+        </p:nvSpPr>
+        <p:spPr/>
+        <p:txBody>
+          <a:bodyPr/>
+          <a:lstStyle/>
+          <a:p>
+            <a:pPr lvl="0" indent="0" marL="0">
+              <a:buNone/>
+            </a:pPr>
+            <a:r>
+              <a:rPr/>
+              <a:t>Each commit has an identifier (a hash, shortened to 7 characters) and points to the commit before it: the history is a chain. A branch is just a name on a commit, moving forward as you commit. </a:t>
+            </a:r>
+            <a:r>
+              <a:rPr>
+                <a:latin typeface="Courier"/>
+              </a:rPr>
+              <a:t>git switch -c new-plot</a:t>
+            </a:r>
+            <a:r>
+              <a:rPr/>
+              <a:t> starts one: try an idea without touching </a:t>
+            </a:r>
+            <a:r>
+              <a:rPr>
+                <a:latin typeface="Courier"/>
+              </a:rPr>
+              <a:t>main</a:t>
+            </a:r>
+            <a:r>
+              <a:rPr/>
+              <a:t>. If it works, </a:t>
+            </a:r>
+            <a:r>
+              <a:rPr>
+                <a:latin typeface="Courier"/>
+              </a:rPr>
+              <a:t>git merge new-plot</a:t>
+            </a:r>
+            <a:r>
+              <a:rPr/>
+              <a:t> brings it back; if not, delete the branch and </a:t>
+            </a:r>
+            <a:r>
+              <a:rPr>
+                <a:latin typeface="Courier"/>
+              </a:rPr>
+              <a:t>main</a:t>
+            </a:r>
+            <a:r>
+              <a:rPr/>
+              <a:t> never knew. </a:t>
+            </a:r>
+            <a:r>
+              <a:rPr>
+                <a:latin typeface="Courier"/>
+              </a:rPr>
+              <a:t>git switch</a:t>
+            </a:r>
+            <a:r>
+              <a:rPr/>
+              <a:t> / </a:t>
+            </a:r>
+            <a:r>
+              <a:rPr>
+                <a:latin typeface="Courier"/>
+              </a:rPr>
+              <a:t>git checkout &lt;hash&gt;</a:t>
+            </a:r>
+            <a:r>
+              <a:rPr/>
+              <a:t> moves HEAD, and the files in the folder change to match that snapshot. Nothing is lost: every commit is still there.</a:t>
+            </a:r>
+          </a:p>
+        </p:txBody>
+      </p:sp>
+      <p:sp>
+        <p:nvSpPr>
+          <p:cNvPr id="4" name="Slide Number Placeholder 3"/>
+          <p:cNvSpPr>
+            <a:spLocks noGrp="1"/>
+          </p:cNvSpPr>
+          <p:nvPr>
+            <p:ph type="sldNum" sz="quarter" idx="10"/>
+          </p:nvPr>
+        </p:nvSpPr>
+        <p:spPr/>
+        <p:txBody>
+          <a:bodyPr/>
+          <a:lstStyle/>
+          <a:p>
+            <a:fld id="{18BDFEC3-8487-43E8-A154-7C12CBC1FFF2}" type="slidenum">
+              <a:rPr lang="en-US"/>
+              <a:t>15</a:t>
+            </a:fld>
+            <a:endParaRPr lang="en-US"/>
+          </a:p>
+        </p:txBody>
+      </p:sp>
+    </p:spTree>
+  </p:cSld>
+</p:notes>
+</file>
+
+<file path=ppt/notesSlides/notesSlide12.xml><?xml version="1.0" encoding="utf-8"?>
+<p:notes xmlns:a="http://schemas.openxmlformats.org/drawingml/2006/main" xmlns:r="http://schemas.openxmlformats.org/officeDocument/2006/relationships" xmlns:p="http://schemas.openxmlformats.org/presentationml/2006/main">
+  <p:cSld>
+    <p:spTree>
+      <p:nvGrpSpPr>
+        <p:cNvPr id="1" name=""/>
+        <p:cNvGrpSpPr/>
+        <p:nvPr/>
+      </p:nvGrpSpPr>
+      <p:grpSpPr>
+        <a:xfrm>
+          <a:off x="0" y="0"/>
+          <a:ext cx="0" cy="0"/>
+          <a:chOff x="0" y="0"/>
+          <a:chExt cx="0" cy="0"/>
+        </a:xfrm>
+      </p:grpSpPr>
+      <p:sp>
+        <p:nvSpPr>
+          <p:cNvPr id="2" name="Slide Image Placeholder 1"/>
+          <p:cNvSpPr>
+            <a:spLocks noGrp="1" noRot="1" noChangeAspect="1"/>
+          </p:cNvSpPr>
+          <p:nvPr>
+            <p:ph type="sldImg"/>
+          </p:nvPr>
+        </p:nvSpPr>
+        <p:spPr/>
+      </p:sp>
+      <p:sp>
+        <p:nvSpPr>
+          <p:cNvPr id="3" name="Notes Placeholder 2"/>
+          <p:cNvSpPr>
+            <a:spLocks noGrp="1"/>
+          </p:cNvSpPr>
+          <p:nvPr>
+            <p:ph type="body" idx="1"/>
+          </p:nvPr>
+        </p:nvSpPr>
+        <p:spPr/>
+        <p:txBody>
+          <a:bodyPr/>
+          <a:lstStyle/>
+          <a:p>
+            <a:pPr lvl="0" indent="0" marL="0">
+              <a:buNone/>
+            </a:pPr>
+            <a:r>
+              <a:rPr/>
+              <a:t>git works entirely on your machine: commit on a train, without network. A remote is another copy of the repository, usually on GitHub (or GitLab, or the hospital’s own server). </a:t>
+            </a:r>
+            <a:r>
+              <a:rPr>
+                <a:latin typeface="Courier"/>
+              </a:rPr>
+              <a:t>git clone</a:t>
+            </a:r>
+            <a:r>
+              <a:rPr/>
+              <a:t> makes your copy once; </a:t>
+            </a:r>
+            <a:r>
+              <a:rPr>
+                <a:latin typeface="Courier"/>
+              </a:rPr>
+              <a:t>git push</a:t>
+            </a:r>
+            <a:r>
+              <a:rPr/>
+              <a:t> sends your new commits; </a:t>
+            </a:r>
+            <a:r>
+              <a:rPr>
+                <a:latin typeface="Courier"/>
+              </a:rPr>
+              <a:t>git pull</a:t>
+            </a:r>
+            <a:r>
+              <a:rPr/>
+              <a:t> fetches the others’ commits and merges them into yours. GitHub adds what git does not have: a web page for the project, issues to track bugs, pull requests to review a change before it is merged. The course material lives there. Two people editing the same lines produce a conflict: git marks both versions in the file, you choose, then commit. It is a normal event, not an error.</a:t>
+            </a:r>
+          </a:p>
+        </p:txBody>
+      </p:sp>
+      <p:sp>
+        <p:nvSpPr>
+          <p:cNvPr id="4" name="Slide Number Placeholder 3"/>
+          <p:cNvSpPr>
+            <a:spLocks noGrp="1"/>
+          </p:cNvSpPr>
+          <p:nvPr>
+            <p:ph type="sldNum" sz="quarter" idx="10"/>
+          </p:nvPr>
+        </p:nvSpPr>
+        <p:spPr/>
+        <p:txBody>
+          <a:bodyPr/>
+          <a:lstStyle/>
+          <a:p>
+            <a:fld id="{18BDFEC3-8487-43E8-A154-7C12CBC1FFF2}" type="slidenum">
+              <a:rPr lang="en-US"/>
+              <a:t>16</a:t>
+            </a:fld>
+            <a:endParaRPr lang="en-US"/>
+          </a:p>
+        </p:txBody>
+      </p:sp>
+    </p:spTree>
+  </p:cSld>
+</p:notes>
+</file>
+
+<file path=ppt/notesSlides/notesSlide13.xml><?xml version="1.0" encoding="utf-8"?>
+<p:notes xmlns:a="http://schemas.openxmlformats.org/drawingml/2006/main" xmlns:r="http://schemas.openxmlformats.org/officeDocument/2006/relationships" xmlns:p="http://schemas.openxmlformats.org/presentationml/2006/main">
+  <p:cSld>
+    <p:spTree>
+      <p:nvGrpSpPr>
+        <p:cNvPr id="1" name=""/>
+        <p:cNvGrpSpPr/>
+        <p:nvPr/>
+      </p:nvGrpSpPr>
+      <p:grpSpPr>
+        <a:xfrm>
+          <a:off x="0" y="0"/>
+          <a:ext cx="0" cy="0"/>
+          <a:chOff x="0" y="0"/>
+          <a:chExt cx="0" cy="0"/>
+        </a:xfrm>
+      </p:grpSpPr>
+      <p:sp>
+        <p:nvSpPr>
+          <p:cNvPr id="2" name="Slide Image Placeholder 1"/>
+          <p:cNvSpPr>
+            <a:spLocks noGrp="1" noRot="1" noChangeAspect="1"/>
+          </p:cNvSpPr>
+          <p:nvPr>
+            <p:ph type="sldImg"/>
+          </p:nvPr>
+        </p:nvSpPr>
+        <p:spPr/>
+      </p:sp>
+      <p:sp>
+        <p:nvSpPr>
+          <p:cNvPr id="3" name="Notes Placeholder 2"/>
+          <p:cNvSpPr>
+            <a:spLocks noGrp="1"/>
+          </p:cNvSpPr>
+          <p:nvPr>
+            <p:ph type="body" idx="1"/>
+          </p:nvPr>
+        </p:nvSpPr>
+        <p:spPr/>
+        <p:txBody>
+          <a:bodyPr/>
+          <a:lstStyle/>
+          <a:p>
+            <a:pPr lvl="0" indent="0" marL="0">
+              <a:buNone/>
+            </a:pPr>
+            <a:r>
+              <a:rPr/>
+              <a:t>The everyday collaboration loop: pull before starting, push when done. Authentication: GitHub no longer accepts your password on the command line. Use an SSH key (</a:t>
+            </a:r>
+            <a:r>
+              <a:rPr>
+                <a:latin typeface="Courier"/>
+              </a:rPr>
+              <a:t>ssh-keygen</a:t>
+            </a:r>
+            <a:r>
+              <a:rPr/>
+              <a:t>, then paste the public key in GitHub settings) or </a:t>
+            </a:r>
+            <a:r>
+              <a:rPr>
+                <a:latin typeface="Courier"/>
+              </a:rPr>
+              <a:t>gh auth login</a:t>
+            </a:r>
+            <a:r>
+              <a:rPr/>
+              <a:t>. This is a good exercise in its own right, and it reuses </a:t>
+            </a:r>
+            <a:r>
+              <a:rPr>
+                <a:latin typeface="Courier"/>
+              </a:rPr>
+              <a:t>ssh</a:t>
+            </a:r>
+            <a:r>
+              <a:rPr/>
+              <a:t> from the first section. For a new project: create the empty repository on GitHub, then </a:t>
+            </a:r>
+            <a:r>
+              <a:rPr>
+                <a:latin typeface="Courier"/>
+              </a:rPr>
+              <a:t>git remote add origin &lt;url&gt;</a:t>
+            </a:r>
+            <a:r>
+              <a:rPr/>
+              <a:t> and </a:t>
+            </a:r>
+            <a:r>
+              <a:rPr>
+                <a:latin typeface="Courier"/>
+              </a:rPr>
+              <a:t>git push -u origin main</a:t>
+            </a:r>
+            <a:r>
+              <a:rPr/>
+              <a:t> from your existing folder.</a:t>
+            </a:r>
+          </a:p>
+        </p:txBody>
+      </p:sp>
+      <p:sp>
+        <p:nvSpPr>
+          <p:cNvPr id="4" name="Slide Number Placeholder 3"/>
+          <p:cNvSpPr>
+            <a:spLocks noGrp="1"/>
+          </p:cNvSpPr>
+          <p:nvPr>
+            <p:ph type="sldNum" sz="quarter" idx="10"/>
+          </p:nvPr>
+        </p:nvSpPr>
+        <p:spPr/>
+        <p:txBody>
+          <a:bodyPr/>
+          <a:lstStyle/>
+          <a:p>
+            <a:fld id="{18BDFEC3-8487-43E8-A154-7C12CBC1FFF2}" type="slidenum">
+              <a:rPr lang="en-US"/>
+              <a:t>17</a:t>
+            </a:fld>
+            <a:endParaRPr lang="en-US"/>
+          </a:p>
+        </p:txBody>
+      </p:sp>
+    </p:spTree>
+  </p:cSld>
+</p:notes>
+</file>
+
+<file path=ppt/notesSlides/notesSlide14.xml><?xml version="1.0" encoding="utf-8"?>
+<p:notes xmlns:a="http://schemas.openxmlformats.org/drawingml/2006/main" xmlns:r="http://schemas.openxmlformats.org/officeDocument/2006/relationships" xmlns:p="http://schemas.openxmlformats.org/presentationml/2006/main">
+  <p:cSld>
+    <p:spTree>
+      <p:nvGrpSpPr>
+        <p:cNvPr id="1" name=""/>
+        <p:cNvGrpSpPr/>
+        <p:nvPr/>
+      </p:nvGrpSpPr>
+      <p:grpSpPr>
+        <a:xfrm>
+          <a:off x="0" y="0"/>
+          <a:ext cx="0" cy="0"/>
+          <a:chOff x="0" y="0"/>
+          <a:chExt cx="0" cy="0"/>
+        </a:xfrm>
+      </p:grpSpPr>
+      <p:sp>
+        <p:nvSpPr>
+          <p:cNvPr id="2" name="Slide Image Placeholder 1"/>
+          <p:cNvSpPr>
+            <a:spLocks noGrp="1" noRot="1" noChangeAspect="1"/>
+          </p:cNvSpPr>
+          <p:nvPr>
+            <p:ph type="sldImg"/>
+          </p:nvPr>
+        </p:nvSpPr>
+        <p:spPr/>
+      </p:sp>
+      <p:sp>
+        <p:nvSpPr>
+          <p:cNvPr id="3" name="Notes Placeholder 2"/>
+          <p:cNvSpPr>
+            <a:spLocks noGrp="1"/>
+          </p:cNvSpPr>
+          <p:nvPr>
+            <p:ph type="body" idx="1"/>
+          </p:nvPr>
+        </p:nvSpPr>
+        <p:spPr/>
+        <p:txBody>
+          <a:bodyPr/>
+          <a:lstStyle/>
+          <a:p>
+            <a:pPr lvl="0" indent="0" marL="0">
+              <a:buNone/>
+            </a:pPr>
+            <a:r>
+              <a:rPr/>
+              <a:t>The health-data rule of this session. A commit is forever: deleting a file in a later commit leaves it in the history, readable by anyone who clones. A patient file pushed to a public GitHub repository is a data breach under GDPR, and must be reported. </a:t>
+            </a:r>
+            <a:r>
+              <a:rPr>
+                <a:latin typeface="Courier"/>
+              </a:rPr>
+              <a:t>.gitignore</a:t>
+            </a:r>
+            <a:r>
+              <a:rPr/>
+              <a:t> lists the patterns git must never track: data, secrets, generated files. Write it first, before the first </a:t>
+            </a:r>
+            <a:r>
+              <a:rPr>
+                <a:latin typeface="Courier"/>
+              </a:rPr>
+              <a:t>git add .</a:t>
+            </a:r>
+            <a:r>
+              <a:rPr/>
+              <a:t>. The repository holds the code that reads the data, and a README saying where the data lives and who may access it. The data itself stays on the secured server.</a:t>
+            </a:r>
+          </a:p>
+        </p:txBody>
+      </p:sp>
+      <p:sp>
+        <p:nvSpPr>
+          <p:cNvPr id="4" name="Slide Number Placeholder 3"/>
+          <p:cNvSpPr>
+            <a:spLocks noGrp="1"/>
+          </p:cNvSpPr>
+          <p:nvPr>
+            <p:ph type="sldNum" sz="quarter" idx="10"/>
+          </p:nvPr>
+        </p:nvSpPr>
+        <p:spPr/>
+        <p:txBody>
+          <a:bodyPr/>
+          <a:lstStyle/>
+          <a:p>
+            <a:fld id="{18BDFEC3-8487-43E8-A154-7C12CBC1FFF2}" type="slidenum">
+              <a:rPr lang="en-US"/>
+              <a:t>18</a:t>
+            </a:fld>
+            <a:endParaRPr lang="en-US"/>
+          </a:p>
+        </p:txBody>
+      </p:sp>
+    </p:spTree>
+  </p:cSld>
+</p:notes>
+</file>
+
 <file path=ppt/notesSlides/notesSlide2.xml><?xml version="1.0" encoding="utf-8"?>
 <p:notes xmlns:a="http://schemas.openxmlformats.org/drawingml/2006/main" xmlns:r="http://schemas.openxmlformats.org/officeDocument/2006/relationships" xmlns:p="http://schemas.openxmlformats.org/presentationml/2006/main">
   <p:cSld>
@@ -1196,6 +1864,210 @@
             <a:fld id="{18BDFEC3-8487-43E8-A154-7C12CBC1FFF2}" type="slidenum">
               <a:rPr lang="en-US"/>
               <a:t>10</a:t>
+            </a:fld>
+            <a:endParaRPr lang="en-US"/>
+          </a:p>
+        </p:txBody>
+      </p:sp>
+    </p:spTree>
+  </p:cSld>
+</p:notes>
+</file>
+
+<file path=ppt/notesSlides/notesSlide8.xml><?xml version="1.0" encoding="utf-8"?>
+<p:notes xmlns:a="http://schemas.openxmlformats.org/drawingml/2006/main" xmlns:r="http://schemas.openxmlformats.org/officeDocument/2006/relationships" xmlns:p="http://schemas.openxmlformats.org/presentationml/2006/main">
+  <p:cSld>
+    <p:spTree>
+      <p:nvGrpSpPr>
+        <p:cNvPr id="1" name=""/>
+        <p:cNvGrpSpPr/>
+        <p:nvPr/>
+      </p:nvGrpSpPr>
+      <p:grpSpPr>
+        <a:xfrm>
+          <a:off x="0" y="0"/>
+          <a:ext cx="0" cy="0"/>
+          <a:chOff x="0" y="0"/>
+          <a:chExt cx="0" cy="0"/>
+        </a:xfrm>
+      </p:grpSpPr>
+      <p:sp>
+        <p:nvSpPr>
+          <p:cNvPr id="2" name="Slide Image Placeholder 1"/>
+          <p:cNvSpPr>
+            <a:spLocks noGrp="1" noRot="1" noChangeAspect="1"/>
+          </p:cNvSpPr>
+          <p:nvPr>
+            <p:ph type="sldImg"/>
+          </p:nvPr>
+        </p:nvSpPr>
+        <p:spPr/>
+      </p:sp>
+      <p:sp>
+        <p:nvSpPr>
+          <p:cNvPr id="3" name="Notes Placeholder 2"/>
+          <p:cNvSpPr>
+            <a:spLocks noGrp="1"/>
+          </p:cNvSpPr>
+          <p:nvPr>
+            <p:ph type="body" idx="1"/>
+          </p:nvPr>
+        </p:nvSpPr>
+        <p:spPr/>
+        <p:txBody>
+          <a:bodyPr/>
+          <a:lstStyle/>
+          <a:p>
+            <a:pPr lvl="0" indent="0" marL="0">
+              <a:buNone/>
+            </a:pPr>
+            <a:r>
+              <a:rPr/>
+              <a:t>Everyone in the room has a folder like the one on the left. It fails exactly when it matters: a reviewer asks which version of the script produced Table 2, and nobody knows. git replaces copies with one file and a history. Each change is recorded with who made it, when, and a message that says why. In a regulated setting (a clinical study, a CE-marked device) this traceability is not a nice-to-have: it is what an audit asks for. git is a command-line program: everything from the first two sections applies.</a:t>
+            </a:r>
+          </a:p>
+        </p:txBody>
+      </p:sp>
+      <p:sp>
+        <p:nvSpPr>
+          <p:cNvPr id="4" name="Slide Number Placeholder 3"/>
+          <p:cNvSpPr>
+            <a:spLocks noGrp="1"/>
+          </p:cNvSpPr>
+          <p:nvPr>
+            <p:ph type="sldNum" sz="quarter" idx="10"/>
+          </p:nvPr>
+        </p:nvSpPr>
+        <p:spPr/>
+        <p:txBody>
+          <a:bodyPr/>
+          <a:lstStyle/>
+          <a:p>
+            <a:fld id="{18BDFEC3-8487-43E8-A154-7C12CBC1FFF2}" type="slidenum">
+              <a:rPr lang="en-US"/>
+              <a:t>12</a:t>
+            </a:fld>
+            <a:endParaRPr lang="en-US"/>
+          </a:p>
+        </p:txBody>
+      </p:sp>
+    </p:spTree>
+  </p:cSld>
+</p:notes>
+</file>
+
+<file path=ppt/notesSlides/notesSlide9.xml><?xml version="1.0" encoding="utf-8"?>
+<p:notes xmlns:a="http://schemas.openxmlformats.org/drawingml/2006/main" xmlns:r="http://schemas.openxmlformats.org/officeDocument/2006/relationships" xmlns:p="http://schemas.openxmlformats.org/presentationml/2006/main">
+  <p:cSld>
+    <p:spTree>
+      <p:nvGrpSpPr>
+        <p:cNvPr id="1" name=""/>
+        <p:cNvGrpSpPr/>
+        <p:nvPr/>
+      </p:nvGrpSpPr>
+      <p:grpSpPr>
+        <a:xfrm>
+          <a:off x="0" y="0"/>
+          <a:ext cx="0" cy="0"/>
+          <a:chOff x="0" y="0"/>
+          <a:chExt cx="0" cy="0"/>
+        </a:xfrm>
+      </p:grpSpPr>
+      <p:sp>
+        <p:nvSpPr>
+          <p:cNvPr id="2" name="Slide Image Placeholder 1"/>
+          <p:cNvSpPr>
+            <a:spLocks noGrp="1" noRot="1" noChangeAspect="1"/>
+          </p:cNvSpPr>
+          <p:nvPr>
+            <p:ph type="sldImg"/>
+          </p:nvPr>
+        </p:nvSpPr>
+        <p:spPr/>
+      </p:sp>
+      <p:sp>
+        <p:nvSpPr>
+          <p:cNvPr id="3" name="Notes Placeholder 2"/>
+          <p:cNvSpPr>
+            <a:spLocks noGrp="1"/>
+          </p:cNvSpPr>
+          <p:nvPr>
+            <p:ph type="body" idx="1"/>
+          </p:nvPr>
+        </p:nvSpPr>
+        <p:spPr/>
+        <p:txBody>
+          <a:bodyPr/>
+          <a:lstStyle/>
+          <a:p>
+            <a:pPr lvl="0" indent="0" marL="0">
+              <a:buNone/>
+            </a:pPr>
+            <a:r>
+              <a:rPr/>
+              <a:t>The one mental model to get right. You edit files in the working folder as usual. </a:t>
+            </a:r>
+            <a:r>
+              <a:rPr>
+                <a:latin typeface="Courier"/>
+              </a:rPr>
+              <a:t>git add</a:t>
+            </a:r>
+            <a:r>
+              <a:rPr/>
+              <a:t> chooses which changes go into the next snapshot (the staging area). </a:t>
+            </a:r>
+            <a:r>
+              <a:rPr>
+                <a:latin typeface="Courier"/>
+              </a:rPr>
+              <a:t>git commit</a:t>
+            </a:r>
+            <a:r>
+              <a:rPr/>
+              <a:t> records that snapshot in the repository, the hidden </a:t>
+            </a:r>
+            <a:r>
+              <a:rPr>
+                <a:latin typeface="Courier"/>
+              </a:rPr>
+              <a:t>.git/</a:t>
+            </a:r>
+            <a:r>
+              <a:rPr/>
+              <a:t> folder. Why the middle step: you changed three files but only two belong to the same fix. Stage those two, commit, then stage and commit the third with its own message. </a:t>
+            </a:r>
+            <a:r>
+              <a:rPr>
+                <a:latin typeface="Courier"/>
+              </a:rPr>
+              <a:t>git status</a:t>
+            </a:r>
+            <a:r>
+              <a:rPr/>
+              <a:t> is the command to type when lost: it says what is in each area, and usually suggests the next command.</a:t>
+            </a:r>
+          </a:p>
+        </p:txBody>
+      </p:sp>
+      <p:sp>
+        <p:nvSpPr>
+          <p:cNvPr id="4" name="Slide Number Placeholder 3"/>
+          <p:cNvSpPr>
+            <a:spLocks noGrp="1"/>
+          </p:cNvSpPr>
+          <p:nvPr>
+            <p:ph type="sldNum" sz="quarter" idx="10"/>
+          </p:nvPr>
+        </p:nvSpPr>
+        <p:spPr/>
+        <p:txBody>
+          <a:bodyPr/>
+          <a:lstStyle/>
+          <a:p>
+            <a:fld id="{18BDFEC3-8487-43E8-A154-7C12CBC1FFF2}" type="slidenum">
+              <a:rPr lang="en-US"/>
+              <a:t>13</a:t>
             </a:fld>
             <a:endParaRPr lang="en-US"/>
           </a:p>
@@ -4200,7 +5072,7 @@
             </a:pPr>
             <a:r>
               <a:rPr/>
-              <a:t>Session 1</a:t>
+              <a:t>Session 2</a:t>
             </a:r>
             <a:br/>
             <a:r>
@@ -4648,6 +5520,933 @@
           </a:graphicData>
         </a:graphic>
       </p:graphicFrame>
+    </p:spTree>
+  </p:cSld>
+</p:sld>
+</file>
+
+<file path=ppt/slides/slide11.xml><?xml version="1.0" encoding="utf-8"?>
+<p:sld xmlns:a="http://schemas.openxmlformats.org/drawingml/2006/main" xmlns:r="http://schemas.openxmlformats.org/officeDocument/2006/relationships" xmlns:p="http://schemas.openxmlformats.org/presentationml/2006/main">
+  <p:cSld>
+    <p:spTree>
+      <p:nvGrpSpPr>
+        <p:cNvPr id="1" name=""/>
+        <p:cNvGrpSpPr/>
+        <p:nvPr/>
+      </p:nvGrpSpPr>
+      <p:grpSpPr>
+        <a:xfrm>
+          <a:off x="0" y="0"/>
+          <a:ext cx="0" cy="0"/>
+          <a:chOff x="0" y="0"/>
+          <a:chExt cx="0" cy="0"/>
+        </a:xfrm>
+      </p:grpSpPr>
+      <p:sp>
+        <p:nvSpPr>
+          <p:cNvPr id="2" name="Title 1"/>
+          <p:cNvSpPr>
+            <a:spLocks noGrp="1"/>
+          </p:cNvSpPr>
+          <p:nvPr>
+            <p:ph type="title"/>
+          </p:nvPr>
+        </p:nvSpPr>
+        <p:spPr>
+          <a:xfrm>
+            <a:off x="722313" y="3305176"/>
+            <a:ext cx="7772400" cy="1021556"/>
+          </a:xfrm>
+        </p:spPr>
+        <p:txBody>
+          <a:bodyPr>
+            <a:normAutofit/>
+          </a:bodyPr>
+          <a:lstStyle/>
+          <a:p>
+            <a:pPr lvl="0" indent="0" marL="0">
+              <a:buNone/>
+            </a:pPr>
+            <a:r>
+              <a:rPr/>
+              <a:t>3. Version control</a:t>
+            </a:r>
+          </a:p>
+        </p:txBody>
+      </p:sp>
+    </p:spTree>
+  </p:cSld>
+</p:sld>
+</file>
+
+<file path=ppt/slides/slide12.xml><?xml version="1.0" encoding="utf-8"?>
+<p:sld xmlns:a="http://schemas.openxmlformats.org/drawingml/2006/main" xmlns:r="http://schemas.openxmlformats.org/officeDocument/2006/relationships" xmlns:p="http://schemas.openxmlformats.org/presentationml/2006/main">
+  <p:cSld>
+    <p:spTree>
+      <p:nvGrpSpPr>
+        <p:cNvPr id="1" name=""/>
+        <p:cNvGrpSpPr/>
+        <p:nvPr/>
+      </p:nvGrpSpPr>
+      <p:grpSpPr>
+        <a:xfrm>
+          <a:off x="0" y="0"/>
+          <a:ext cx="0" cy="0"/>
+          <a:chOff x="0" y="0"/>
+          <a:chExt cx="0" cy="0"/>
+        </a:xfrm>
+      </p:grpSpPr>
+      <p:sp>
+        <p:nvSpPr>
+          <p:cNvPr id="2" name="Title 1"/>
+          <p:cNvSpPr>
+            <a:spLocks noGrp="1"/>
+          </p:cNvSpPr>
+          <p:nvPr>
+            <p:ph type="title"/>
+          </p:nvPr>
+        </p:nvSpPr>
+        <p:spPr/>
+        <p:txBody>
+          <a:bodyPr>
+            <a:normAutofit/>
+          </a:bodyPr>
+          <a:lstStyle/>
+          <a:p>
+            <a:pPr lvl="0" indent="0" marL="0">
+              <a:buNone/>
+            </a:pPr>
+            <a:r>
+              <a:rPr/>
+              <a:t>Which file is the final one?</a:t>
+            </a:r>
+          </a:p>
+        </p:txBody>
+      </p:sp>
+      <p:pic>
+        <p:nvPicPr>
+          <p:cNvPr descr="img/git_why.png" id="0" name="Picture 1"/>
+          <p:cNvPicPr>
+            <a:picLocks noGrp="1" noChangeAspect="1"/>
+          </p:cNvPicPr>
+          <p:nvPr/>
+        </p:nvPicPr>
+        <p:blipFill>
+          <a:blip r:embed="rId3"/>
+          <a:stretch>
+            <a:fillRect/>
+          </a:stretch>
+        </p:blipFill>
+        <p:spPr bwMode="auto">
+          <a:xfrm>
+            <a:off x="457200" y="1193800"/>
+            <a:ext cx="8229600" cy="3390900"/>
+          </a:xfrm>
+          <a:prstGeom prst="rect">
+            <a:avLst/>
+          </a:prstGeom>
+          <a:noFill/>
+          <a:ln w="9525">
+            <a:noFill/>
+            <a:headEnd/>
+            <a:tailEnd/>
+          </a:ln>
+        </p:spPr>
+      </p:pic>
+    </p:spTree>
+  </p:cSld>
+</p:sld>
+</file>
+
+<file path=ppt/slides/slide13.xml><?xml version="1.0" encoding="utf-8"?>
+<p:sld xmlns:a="http://schemas.openxmlformats.org/drawingml/2006/main" xmlns:r="http://schemas.openxmlformats.org/officeDocument/2006/relationships" xmlns:p="http://schemas.openxmlformats.org/presentationml/2006/main">
+  <p:cSld>
+    <p:spTree>
+      <p:nvGrpSpPr>
+        <p:cNvPr id="1" name=""/>
+        <p:cNvGrpSpPr/>
+        <p:nvPr/>
+      </p:nvGrpSpPr>
+      <p:grpSpPr>
+        <a:xfrm>
+          <a:off x="0" y="0"/>
+          <a:ext cx="0" cy="0"/>
+          <a:chOff x="0" y="0"/>
+          <a:chExt cx="0" cy="0"/>
+        </a:xfrm>
+      </p:grpSpPr>
+      <p:sp>
+        <p:nvSpPr>
+          <p:cNvPr id="2" name="Title 1"/>
+          <p:cNvSpPr>
+            <a:spLocks noGrp="1"/>
+          </p:cNvSpPr>
+          <p:nvPr>
+            <p:ph type="title"/>
+          </p:nvPr>
+        </p:nvSpPr>
+        <p:spPr/>
+        <p:txBody>
+          <a:bodyPr>
+            <a:normAutofit/>
+          </a:bodyPr>
+          <a:lstStyle/>
+          <a:p>
+            <a:pPr lvl="0" indent="0" marL="0">
+              <a:buNone/>
+            </a:pPr>
+            <a:r>
+              <a:rPr/>
+              <a:t>Creating a snapshot</a:t>
+            </a:r>
+          </a:p>
+        </p:txBody>
+      </p:sp>
+      <p:pic>
+        <p:nvPicPr>
+          <p:cNvPr descr="img/git_areas.png" id="0" name="Picture 1"/>
+          <p:cNvPicPr>
+            <a:picLocks noGrp="1" noChangeAspect="1"/>
+          </p:cNvPicPr>
+          <p:nvPr/>
+        </p:nvPicPr>
+        <p:blipFill>
+          <a:blip r:embed="rId3"/>
+          <a:stretch>
+            <a:fillRect/>
+          </a:stretch>
+        </p:blipFill>
+        <p:spPr bwMode="auto">
+          <a:xfrm>
+            <a:off x="457200" y="1193800"/>
+            <a:ext cx="8229600" cy="3390900"/>
+          </a:xfrm>
+          <a:prstGeom prst="rect">
+            <a:avLst/>
+          </a:prstGeom>
+          <a:noFill/>
+          <a:ln w="9525">
+            <a:noFill/>
+            <a:headEnd/>
+            <a:tailEnd/>
+          </a:ln>
+        </p:spPr>
+      </p:pic>
+    </p:spTree>
+  </p:cSld>
+</p:sld>
+</file>
+
+<file path=ppt/slides/slide14.xml><?xml version="1.0" encoding="utf-8"?>
+<p:sld xmlns:a="http://schemas.openxmlformats.org/drawingml/2006/main" xmlns:r="http://schemas.openxmlformats.org/officeDocument/2006/relationships" xmlns:p="http://schemas.openxmlformats.org/presentationml/2006/main">
+  <p:cSld>
+    <p:spTree>
+      <p:nvGrpSpPr>
+        <p:cNvPr id="1" name=""/>
+        <p:cNvGrpSpPr/>
+        <p:nvPr/>
+      </p:nvGrpSpPr>
+      <p:grpSpPr>
+        <a:xfrm>
+          <a:off x="0" y="0"/>
+          <a:ext cx="0" cy="0"/>
+          <a:chOff x="0" y="0"/>
+          <a:chExt cx="0" cy="0"/>
+        </a:xfrm>
+      </p:grpSpPr>
+      <p:sp>
+        <p:nvSpPr>
+          <p:cNvPr id="2" name="Title 1"/>
+          <p:cNvSpPr>
+            <a:spLocks noGrp="1"/>
+          </p:cNvSpPr>
+          <p:nvPr>
+            <p:ph type="title"/>
+          </p:nvPr>
+        </p:nvSpPr>
+        <p:spPr/>
+        <p:txBody>
+          <a:bodyPr>
+            <a:normAutofit/>
+          </a:bodyPr>
+          <a:lstStyle/>
+          <a:p>
+            <a:pPr lvl="0" indent="0" marL="0">
+              <a:buNone/>
+            </a:pPr>
+            <a:r>
+              <a:rPr/>
+              <a:t>Daily loop</a:t>
+            </a:r>
+          </a:p>
+        </p:txBody>
+      </p:sp>
+      <p:sp>
+        <p:nvSpPr>
+          <p:cNvPr id="3" name="Content Placeholder 2"/>
+          <p:cNvSpPr>
+            <a:spLocks noGrp="1"/>
+          </p:cNvSpPr>
+          <p:nvPr>
+            <p:ph idx="1"/>
+          </p:nvPr>
+        </p:nvSpPr>
+        <p:spPr/>
+        <p:txBody>
+          <a:bodyPr>
+            <a:normAutofit/>
+          </a:bodyPr>
+          <a:lstStyle/>
+          <a:p>
+            <a:pPr lvl="0" indent="0">
+              <a:buNone/>
+            </a:pPr>
+            <a:r>
+              <a:rPr>
+                <a:solidFill>
+                  <a:srgbClr val="06287E"/>
+                </a:solidFill>
+                <a:latin typeface="Courier"/>
+              </a:rPr>
+              <a:t>git</a:t>
+            </a:r>
+            <a:r>
+              <a:rPr>
+                <a:latin typeface="Courier"/>
+              </a:rPr>
+              <a:t> init              </a:t>
+            </a:r>
+            <a:r>
+              <a:rPr i="1">
+                <a:solidFill>
+                  <a:srgbClr val="60A0B0"/>
+                </a:solidFill>
+                <a:latin typeface="Courier"/>
+              </a:rPr>
+              <a:t># once per project</a:t>
+            </a:r>
+            <a:br/>
+            <a:r>
+              <a:rPr>
+                <a:solidFill>
+                  <a:srgbClr val="06287E"/>
+                </a:solidFill>
+                <a:latin typeface="Courier"/>
+              </a:rPr>
+              <a:t>git</a:t>
+            </a:r>
+            <a:r>
+              <a:rPr>
+                <a:latin typeface="Courier"/>
+              </a:rPr>
+              <a:t> status            </a:t>
+            </a:r>
+            <a:r>
+              <a:rPr i="1">
+                <a:solidFill>
+                  <a:srgbClr val="60A0B0"/>
+                </a:solidFill>
+                <a:latin typeface="Courier"/>
+              </a:rPr>
+              <a:t># what changed?</a:t>
+            </a:r>
+            <a:br/>
+            <a:r>
+              <a:rPr>
+                <a:solidFill>
+                  <a:srgbClr val="06287E"/>
+                </a:solidFill>
+                <a:latin typeface="Courier"/>
+              </a:rPr>
+              <a:t>git</a:t>
+            </a:r>
+            <a:r>
+              <a:rPr>
+                <a:latin typeface="Courier"/>
+              </a:rPr>
+              <a:t> diff              </a:t>
+            </a:r>
+            <a:r>
+              <a:rPr i="1">
+                <a:solidFill>
+                  <a:srgbClr val="60A0B0"/>
+                </a:solidFill>
+                <a:latin typeface="Courier"/>
+              </a:rPr>
+              <a:t># show the changes</a:t>
+            </a:r>
+            <a:br/>
+            <a:r>
+              <a:rPr>
+                <a:solidFill>
+                  <a:srgbClr val="06287E"/>
+                </a:solidFill>
+                <a:latin typeface="Courier"/>
+              </a:rPr>
+              <a:t>git</a:t>
+            </a:r>
+            <a:r>
+              <a:rPr>
+                <a:latin typeface="Courier"/>
+              </a:rPr>
+              <a:t> add clean.py      </a:t>
+            </a:r>
+            <a:r>
+              <a:rPr i="1">
+                <a:solidFill>
+                  <a:srgbClr val="60A0B0"/>
+                </a:solidFill>
+                <a:latin typeface="Courier"/>
+              </a:rPr>
+              <a:t># stage a file</a:t>
+            </a:r>
+            <a:br/>
+            <a:r>
+              <a:rPr>
+                <a:solidFill>
+                  <a:srgbClr val="06287E"/>
+                </a:solidFill>
+                <a:latin typeface="Courier"/>
+              </a:rPr>
+              <a:t>git</a:t>
+            </a:r>
+            <a:r>
+              <a:rPr>
+                <a:latin typeface="Courier"/>
+              </a:rPr>
+              <a:t> commit </a:t>
+            </a:r>
+            <a:r>
+              <a:rPr>
+                <a:solidFill>
+                  <a:srgbClr val="7D9029"/>
+                </a:solidFill>
+                <a:latin typeface="Courier"/>
+              </a:rPr>
+              <a:t>-m</a:t>
+            </a:r>
+            <a:r>
+              <a:rPr>
+                <a:latin typeface="Courier"/>
+              </a:rPr>
+              <a:t> </a:t>
+            </a:r>
+            <a:r>
+              <a:rPr>
+                <a:solidFill>
+                  <a:srgbClr val="4070A0"/>
+                </a:solidFill>
+                <a:latin typeface="Courier"/>
+              </a:rPr>
+              <a:t>"Drop rows without age"</a:t>
+            </a:r>
+            <a:br/>
+            <a:r>
+              <a:rPr>
+                <a:solidFill>
+                  <a:srgbClr val="06287E"/>
+                </a:solidFill>
+                <a:latin typeface="Courier"/>
+              </a:rPr>
+              <a:t>git</a:t>
+            </a:r>
+            <a:r>
+              <a:rPr>
+                <a:latin typeface="Courier"/>
+              </a:rPr>
+              <a:t> log </a:t>
+            </a:r>
+            <a:r>
+              <a:rPr>
+                <a:solidFill>
+                  <a:srgbClr val="7D9029"/>
+                </a:solidFill>
+                <a:latin typeface="Courier"/>
+              </a:rPr>
+              <a:t>--oneline</a:t>
+            </a:r>
+            <a:r>
+              <a:rPr>
+                <a:latin typeface="Courier"/>
+              </a:rPr>
+              <a:t>     </a:t>
+            </a:r>
+            <a:r>
+              <a:rPr i="1">
+                <a:solidFill>
+                  <a:srgbClr val="60A0B0"/>
+                </a:solidFill>
+                <a:latin typeface="Courier"/>
+              </a:rPr>
+              <a:t># the history</a:t>
+            </a:r>
+          </a:p>
+        </p:txBody>
+      </p:sp>
+    </p:spTree>
+  </p:cSld>
+</p:sld>
+</file>
+
+<file path=ppt/slides/slide15.xml><?xml version="1.0" encoding="utf-8"?>
+<p:sld xmlns:a="http://schemas.openxmlformats.org/drawingml/2006/main" xmlns:r="http://schemas.openxmlformats.org/officeDocument/2006/relationships" xmlns:p="http://schemas.openxmlformats.org/presentationml/2006/main">
+  <p:cSld>
+    <p:spTree>
+      <p:nvGrpSpPr>
+        <p:cNvPr id="1" name=""/>
+        <p:cNvGrpSpPr/>
+        <p:nvPr/>
+      </p:nvGrpSpPr>
+      <p:grpSpPr>
+        <a:xfrm>
+          <a:off x="0" y="0"/>
+          <a:ext cx="0" cy="0"/>
+          <a:chOff x="0" y="0"/>
+          <a:chExt cx="0" cy="0"/>
+        </a:xfrm>
+      </p:grpSpPr>
+      <p:sp>
+        <p:nvSpPr>
+          <p:cNvPr id="2" name="Title 1"/>
+          <p:cNvSpPr>
+            <a:spLocks noGrp="1"/>
+          </p:cNvSpPr>
+          <p:nvPr>
+            <p:ph type="title"/>
+          </p:nvPr>
+        </p:nvSpPr>
+        <p:spPr/>
+        <p:txBody>
+          <a:bodyPr>
+            <a:normAutofit/>
+          </a:bodyPr>
+          <a:lstStyle/>
+          <a:p>
+            <a:pPr lvl="0" indent="0" marL="0">
+              <a:buNone/>
+            </a:pPr>
+            <a:r>
+              <a:rPr/>
+              <a:t>History and branches</a:t>
+            </a:r>
+          </a:p>
+        </p:txBody>
+      </p:sp>
+      <p:pic>
+        <p:nvPicPr>
+          <p:cNvPr descr="img/git_history.png" id="0" name="Picture 1"/>
+          <p:cNvPicPr>
+            <a:picLocks noGrp="1" noChangeAspect="1"/>
+          </p:cNvPicPr>
+          <p:nvPr/>
+        </p:nvPicPr>
+        <p:blipFill>
+          <a:blip r:embed="rId3"/>
+          <a:stretch>
+            <a:fillRect/>
+          </a:stretch>
+        </p:blipFill>
+        <p:spPr bwMode="auto">
+          <a:xfrm>
+            <a:off x="457200" y="1193800"/>
+            <a:ext cx="8229600" cy="3390900"/>
+          </a:xfrm>
+          <a:prstGeom prst="rect">
+            <a:avLst/>
+          </a:prstGeom>
+          <a:noFill/>
+          <a:ln w="9525">
+            <a:noFill/>
+            <a:headEnd/>
+            <a:tailEnd/>
+          </a:ln>
+        </p:spPr>
+      </p:pic>
+    </p:spTree>
+  </p:cSld>
+</p:sld>
+</file>
+
+<file path=ppt/slides/slide16.xml><?xml version="1.0" encoding="utf-8"?>
+<p:sld xmlns:a="http://schemas.openxmlformats.org/drawingml/2006/main" xmlns:r="http://schemas.openxmlformats.org/officeDocument/2006/relationships" xmlns:p="http://schemas.openxmlformats.org/presentationml/2006/main">
+  <p:cSld>
+    <p:spTree>
+      <p:nvGrpSpPr>
+        <p:cNvPr id="1" name=""/>
+        <p:cNvGrpSpPr/>
+        <p:nvPr/>
+      </p:nvGrpSpPr>
+      <p:grpSpPr>
+        <a:xfrm>
+          <a:off x="0" y="0"/>
+          <a:ext cx="0" cy="0"/>
+          <a:chOff x="0" y="0"/>
+          <a:chExt cx="0" cy="0"/>
+        </a:xfrm>
+      </p:grpSpPr>
+      <p:sp>
+        <p:nvSpPr>
+          <p:cNvPr id="2" name="Title 1"/>
+          <p:cNvSpPr>
+            <a:spLocks noGrp="1"/>
+          </p:cNvSpPr>
+          <p:nvPr>
+            <p:ph type="title"/>
+          </p:nvPr>
+        </p:nvSpPr>
+        <p:spPr/>
+        <p:txBody>
+          <a:bodyPr>
+            <a:normAutofit/>
+          </a:bodyPr>
+          <a:lstStyle/>
+          <a:p>
+            <a:pPr lvl="0" indent="0" marL="0">
+              <a:buNone/>
+            </a:pPr>
+            <a:r>
+              <a:rPr/>
+              <a:t>Local and remote</a:t>
+            </a:r>
+          </a:p>
+        </p:txBody>
+      </p:sp>
+      <p:pic>
+        <p:nvPicPr>
+          <p:cNvPr descr="img/git_remote.png" id="0" name="Picture 1"/>
+          <p:cNvPicPr>
+            <a:picLocks noGrp="1" noChangeAspect="1"/>
+          </p:cNvPicPr>
+          <p:nvPr/>
+        </p:nvPicPr>
+        <p:blipFill>
+          <a:blip r:embed="rId3"/>
+          <a:stretch>
+            <a:fillRect/>
+          </a:stretch>
+        </p:blipFill>
+        <p:spPr bwMode="auto">
+          <a:xfrm>
+            <a:off x="457200" y="1193800"/>
+            <a:ext cx="8229600" cy="3390900"/>
+          </a:xfrm>
+          <a:prstGeom prst="rect">
+            <a:avLst/>
+          </a:prstGeom>
+          <a:noFill/>
+          <a:ln w="9525">
+            <a:noFill/>
+            <a:headEnd/>
+            <a:tailEnd/>
+          </a:ln>
+        </p:spPr>
+      </p:pic>
+    </p:spTree>
+  </p:cSld>
+</p:sld>
+</file>
+
+<file path=ppt/slides/slide17.xml><?xml version="1.0" encoding="utf-8"?>
+<p:sld xmlns:a="http://schemas.openxmlformats.org/drawingml/2006/main" xmlns:r="http://schemas.openxmlformats.org/officeDocument/2006/relationships" xmlns:p="http://schemas.openxmlformats.org/presentationml/2006/main">
+  <p:cSld>
+    <p:spTree>
+      <p:nvGrpSpPr>
+        <p:cNvPr id="1" name=""/>
+        <p:cNvGrpSpPr/>
+        <p:nvPr/>
+      </p:nvGrpSpPr>
+      <p:grpSpPr>
+        <a:xfrm>
+          <a:off x="0" y="0"/>
+          <a:ext cx="0" cy="0"/>
+          <a:chOff x="0" y="0"/>
+          <a:chExt cx="0" cy="0"/>
+        </a:xfrm>
+      </p:grpSpPr>
+      <p:sp>
+        <p:nvSpPr>
+          <p:cNvPr id="2" name="Title 1"/>
+          <p:cNvSpPr>
+            <a:spLocks noGrp="1"/>
+          </p:cNvSpPr>
+          <p:nvPr>
+            <p:ph type="title"/>
+          </p:nvPr>
+        </p:nvSpPr>
+        <p:spPr/>
+        <p:txBody>
+          <a:bodyPr>
+            <a:normAutofit/>
+          </a:bodyPr>
+          <a:lstStyle/>
+          <a:p>
+            <a:pPr lvl="0" indent="0" marL="0">
+              <a:buNone/>
+            </a:pPr>
+            <a:r>
+              <a:rPr/>
+              <a:t>Working with GitHub</a:t>
+            </a:r>
+          </a:p>
+        </p:txBody>
+      </p:sp>
+      <p:sp>
+        <p:nvSpPr>
+          <p:cNvPr id="3" name="Content Placeholder 2"/>
+          <p:cNvSpPr>
+            <a:spLocks noGrp="1"/>
+          </p:cNvSpPr>
+          <p:nvPr>
+            <p:ph idx="1"/>
+          </p:nvPr>
+        </p:nvSpPr>
+        <p:spPr/>
+        <p:txBody>
+          <a:bodyPr>
+            <a:normAutofit/>
+          </a:bodyPr>
+          <a:lstStyle/>
+          <a:p>
+            <a:pPr lvl="0" indent="0">
+              <a:buNone/>
+            </a:pPr>
+            <a:r>
+              <a:rPr>
+                <a:solidFill>
+                  <a:srgbClr val="06287E"/>
+                </a:solidFill>
+                <a:latin typeface="Courier"/>
+              </a:rPr>
+              <a:t>git</a:t>
+            </a:r>
+            <a:r>
+              <a:rPr>
+                <a:latin typeface="Courier"/>
+              </a:rPr>
+              <a:t> clone https://github.com/org/repo</a:t>
+            </a:r>
+            <a:br/>
+            <a:r>
+              <a:rPr>
+                <a:solidFill>
+                  <a:srgbClr val="008000"/>
+                </a:solidFill>
+                <a:latin typeface="Courier"/>
+              </a:rPr>
+              <a:t>cd</a:t>
+            </a:r>
+            <a:r>
+              <a:rPr>
+                <a:latin typeface="Courier"/>
+              </a:rPr>
+              <a:t> repo</a:t>
+            </a:r>
+            <a:br/>
+            <a:r>
+              <a:rPr i="1">
+                <a:solidFill>
+                  <a:srgbClr val="60A0B0"/>
+                </a:solidFill>
+                <a:latin typeface="Courier"/>
+              </a:rPr>
+              <a:t># ... edit, add, commit ...</a:t>
+            </a:r>
+            <a:br/>
+            <a:r>
+              <a:rPr>
+                <a:solidFill>
+                  <a:srgbClr val="06287E"/>
+                </a:solidFill>
+                <a:latin typeface="Courier"/>
+              </a:rPr>
+              <a:t>git</a:t>
+            </a:r>
+            <a:r>
+              <a:rPr>
+                <a:latin typeface="Courier"/>
+              </a:rPr>
+              <a:t> pull            </a:t>
+            </a:r>
+            <a:r>
+              <a:rPr i="1">
+                <a:solidFill>
+                  <a:srgbClr val="60A0B0"/>
+                </a:solidFill>
+                <a:latin typeface="Courier"/>
+              </a:rPr>
+              <a:t># get the others' work</a:t>
+            </a:r>
+            <a:br/>
+            <a:r>
+              <a:rPr>
+                <a:solidFill>
+                  <a:srgbClr val="06287E"/>
+                </a:solidFill>
+                <a:latin typeface="Courier"/>
+              </a:rPr>
+              <a:t>git</a:t>
+            </a:r>
+            <a:r>
+              <a:rPr>
+                <a:latin typeface="Courier"/>
+              </a:rPr>
+              <a:t> push            </a:t>
+            </a:r>
+            <a:r>
+              <a:rPr i="1">
+                <a:solidFill>
+                  <a:srgbClr val="60A0B0"/>
+                </a:solidFill>
+                <a:latin typeface="Courier"/>
+              </a:rPr>
+              <a:t># publish yours</a:t>
+            </a:r>
+          </a:p>
+        </p:txBody>
+      </p:sp>
+    </p:spTree>
+  </p:cSld>
+</p:sld>
+</file>
+
+<file path=ppt/slides/slide18.xml><?xml version="1.0" encoding="utf-8"?>
+<p:sld xmlns:a="http://schemas.openxmlformats.org/drawingml/2006/main" xmlns:r="http://schemas.openxmlformats.org/officeDocument/2006/relationships" xmlns:p="http://schemas.openxmlformats.org/presentationml/2006/main">
+  <p:cSld>
+    <p:spTree>
+      <p:nvGrpSpPr>
+        <p:cNvPr id="1" name=""/>
+        <p:cNvGrpSpPr/>
+        <p:nvPr/>
+      </p:nvGrpSpPr>
+      <p:grpSpPr>
+        <a:xfrm>
+          <a:off x="0" y="0"/>
+          <a:ext cx="0" cy="0"/>
+          <a:chOff x="0" y="0"/>
+          <a:chExt cx="0" cy="0"/>
+        </a:xfrm>
+      </p:grpSpPr>
+      <p:sp>
+        <p:nvSpPr>
+          <p:cNvPr id="2" name="Title 1"/>
+          <p:cNvSpPr>
+            <a:spLocks noGrp="1"/>
+          </p:cNvSpPr>
+          <p:nvPr>
+            <p:ph type="title"/>
+          </p:nvPr>
+        </p:nvSpPr>
+        <p:spPr/>
+        <p:txBody>
+          <a:bodyPr>
+            <a:normAutofit/>
+          </a:bodyPr>
+          <a:lstStyle/>
+          <a:p>
+            <a:pPr lvl="0" indent="0" marL="0">
+              <a:buNone/>
+            </a:pPr>
+            <a:r>
+              <a:rPr/>
+              <a:t>What to ignore</a:t>
+            </a:r>
+          </a:p>
+        </p:txBody>
+      </p:sp>
+      <p:sp>
+        <p:nvSpPr>
+          <p:cNvPr id="3" name="Content Placeholder 2"/>
+          <p:cNvSpPr>
+            <a:spLocks noGrp="1"/>
+          </p:cNvSpPr>
+          <p:nvPr>
+            <p:ph idx="1"/>
+          </p:nvPr>
+        </p:nvSpPr>
+        <p:spPr/>
+        <p:txBody>
+          <a:bodyPr>
+            <a:normAutofit/>
+          </a:bodyPr>
+          <a:lstStyle/>
+          <a:p>
+            <a:pPr lvl="0" indent="0">
+              <a:buNone/>
+            </a:pPr>
+            <a:r>
+              <a:rPr i="1">
+                <a:solidFill>
+                  <a:srgbClr val="60A0B0"/>
+                </a:solidFill>
+                <a:latin typeface="Courier"/>
+              </a:rPr>
+              <a:t># .gitignore</a:t>
+            </a:r>
+            <a:br/>
+            <a:r>
+              <a:rPr>
+                <a:latin typeface="Courier"/>
+              </a:rPr>
+              <a:t>data/          </a:t>
+            </a:r>
+            <a:r>
+              <a:rPr i="1">
+                <a:solidFill>
+                  <a:srgbClr val="60A0B0"/>
+                </a:solidFill>
+                <a:latin typeface="Courier"/>
+              </a:rPr>
+              <a:t># patient data</a:t>
+            </a:r>
+            <a:br/>
+            <a:r>
+              <a:rPr>
+                <a:latin typeface="Courier"/>
+              </a:rPr>
+              <a:t>*.csv</a:t>
+            </a:r>
+            <a:br/>
+            <a:r>
+              <a:rPr>
+                <a:latin typeface="Courier"/>
+              </a:rPr>
+              <a:t>.env           </a:t>
+            </a:r>
+            <a:r>
+              <a:rPr i="1">
+                <a:solidFill>
+                  <a:srgbClr val="60A0B0"/>
+                </a:solidFill>
+                <a:latin typeface="Courier"/>
+              </a:rPr>
+              <a:t># passwords, API keys</a:t>
+            </a:r>
+            <a:br/>
+            <a:r>
+              <a:rPr>
+                <a:latin typeface="Courier"/>
+              </a:rPr>
+              <a:t>.venv/         </a:t>
+            </a:r>
+            <a:r>
+              <a:rPr i="1">
+                <a:solidFill>
+                  <a:srgbClr val="60A0B0"/>
+                </a:solidFill>
+                <a:latin typeface="Courier"/>
+              </a:rPr>
+              <a:t># re-created by uv sync</a:t>
+            </a:r>
+            <a:br/>
+            <a:r>
+              <a:rPr>
+                <a:latin typeface="Courier"/>
+              </a:rPr>
+              <a:t>__pycache__/</a:t>
+            </a:r>
+          </a:p>
+        </p:txBody>
+      </p:sp>
     </p:spTree>
   </p:cSld>
 </p:sld>

--- a/Programming01/Session02/slides.pptx
+++ b/Programming01/Session02/slides.pptx
@@ -1128,11 +1128,11 @@
               <a:rPr>
                 <a:latin typeface="Courier"/>
               </a:rPr>
-              <a:t>class Inpatient(Patient)</a:t>
-            </a:r>
-            <a:r>
-              <a:rPr/>
-              <a:t> means “an Inpatient is a Patient, plus a room”. The class in brackets is the parent (base class, superclass); the new one is the child, or subclass. Everything defined on </a:t>
+              <a:t>class InPatient(Patient)</a:t>
+            </a:r>
+            <a:r>
+              <a:rPr/>
+              <a:t> means “an InPatient is a Patient, plus a room”. The class in brackets is the parent (base class, superclass); the new one is the child, or subclass. Everything defined on </a:t>
             </a:r>
             <a:r>
               <a:rPr>
@@ -1148,7 +1148,7 @@
               <a:rPr>
                 <a:latin typeface="Courier"/>
               </a:rPr>
-              <a:t>Inpatient</a:t>
+              <a:t>InPatient</a:t>
             </a:r>
             <a:r>
               <a:rPr/>
@@ -1218,7 +1218,7 @@
               <a:rPr>
                 <a:latin typeface="Courier"/>
               </a:rPr>
-              <a:t>AttributeError: 'Inpatient' object has no attribute 'weight'</a:t>
+              <a:t>AttributeError: 'InPatient' object has no attribute 'weight'</a:t>
             </a:r>
             <a:r>
               <a:rPr/>
@@ -1238,7 +1238,7 @@
               <a:rPr>
                 <a:latin typeface="Courier"/>
               </a:rPr>
-              <a:t>Inpatient</a:t>
+              <a:t>InPatient</a:t>
             </a:r>
             <a:r>
               <a:rPr/>
@@ -1396,7 +1396,7 @@
               <a:rPr>
                 <a:latin typeface="Courier"/>
               </a:rPr>
-              <a:t>Inpatient</a:t>
+              <a:t>InPatient</a:t>
             </a:r>
             <a:r>
               <a:rPr/>
@@ -1482,7 +1482,7 @@
               <a:rPr>
                 <a:latin typeface="Courier"/>
               </a:rPr>
-              <a:t>Inpatient</a:t>
+              <a:t>InPatient</a:t>
             </a:r>
             <a:r>
               <a:rPr/>
@@ -1522,7 +1522,7 @@
               <a:rPr>
                 <a:latin typeface="Courier"/>
               </a:rPr>
-              <a:t>help(Inpatient)</a:t>
+              <a:t>help(InPatient)</a:t>
             </a:r>
             <a:r>
               <a:rPr/>
@@ -7492,7 +7492,7 @@
               <a:rPr>
                 <a:latin typeface="Courier"/>
               </a:rPr>
-              <a:t> Inpatient(</a:t>
+              <a:t> InPatient(</a:t>
             </a:r>
             <a:r>
               <a:rPr>
@@ -7798,6 +7798,89 @@
                 <a:latin typeface="Courier"/>
               </a:rPr>
               <a:t>if</a:t>
+            </a:r>
+            <a:r>
+              <a:rPr>
+                <a:latin typeface="Courier"/>
+              </a:rPr>
+              <a:t> temp </a:t>
+            </a:r>
+            <a:r>
+              <a:rPr>
+                <a:solidFill>
+                  <a:srgbClr val="666666"/>
+                </a:solidFill>
+                <a:latin typeface="Courier"/>
+              </a:rPr>
+              <a:t>&gt;=</a:t>
+            </a:r>
+            <a:r>
+              <a:rPr>
+                <a:latin typeface="Courier"/>
+              </a:rPr>
+              <a:t> </a:t>
+            </a:r>
+            <a:r>
+              <a:rPr>
+                <a:solidFill>
+                  <a:srgbClr val="40A070"/>
+                </a:solidFill>
+                <a:latin typeface="Courier"/>
+              </a:rPr>
+              <a:t>39</a:t>
+            </a:r>
+            <a:r>
+              <a:rPr>
+                <a:latin typeface="Courier"/>
+              </a:rPr>
+              <a:t>:</a:t>
+            </a:r>
+            <a:br/>
+            <a:r>
+              <a:rPr>
+                <a:latin typeface="Courier"/>
+              </a:rPr>
+              <a:t>    </a:t>
+            </a:r>
+            <a:r>
+              <a:rPr>
+                <a:solidFill>
+                  <a:srgbClr val="008000"/>
+                </a:solidFill>
+                <a:latin typeface="Courier"/>
+              </a:rPr>
+              <a:t>print</a:t>
+            </a:r>
+            <a:r>
+              <a:rPr>
+                <a:latin typeface="Courier"/>
+              </a:rPr>
+              <a:t>(</a:t>
+            </a:r>
+            <a:r>
+              <a:rPr>
+                <a:solidFill>
+                  <a:srgbClr val="4070A0"/>
+                </a:solidFill>
+                <a:latin typeface="Courier"/>
+              </a:rPr>
+              <a:t>"high fever"</a:t>
+            </a:r>
+            <a:r>
+              <a:rPr>
+                <a:latin typeface="Courier"/>
+              </a:rPr>
+              <a:t>)</a:t>
+            </a:r>
+            <a:br/>
+            <a:r>
+              <a:rPr b="1">
+                <a:solidFill>
+                  <a:srgbClr val="007020"/>
+                </a:solidFill>
+                <a:latin typeface="Courier"/>
+              </a:rPr>
+              <a:t>elif</a:t>
             </a:r>
             <a:r>
               <a:rPr>
